--- a/system-design-101/vi/lessons/sd-06-002/slides/sd-06-002.pptx
+++ b/system-design-101/vi/lessons/sd-06-002/slides/sd-06-002.pptx
@@ -7159,10 +7159,10 @@
                 <a:ea typeface="Be Vietnam Pro SemiBold" pitchFamily="34" charset="-122"/>
                 <a:cs typeface="Be Vietnam Pro SemiBold" pitchFamily="34" charset="-120"/>
               </a:rPr>
-              <a:t> phần nội</a:t>
-            </a:r>
-            <a:r>
-              <a:rPr lang="en-US" sz="3450" dirty="0" spc="-3" kern="0">
+              <a:t> phần</a:t>
+            </a:r>
+            <a:r>
+              <a:rPr lang="en-US" sz="3450" dirty="0" spc="-12" kern="0">
                 <a:solidFill>
                   <a:srgbClr val="14161C"/>
                 </a:solidFill>
@@ -7170,10 +7170,10 @@
                 <a:ea typeface="Be Vietnam Pro SemiBold" pitchFamily="34" charset="-122"/>
                 <a:cs typeface="Be Vietnam Pro SemiBold" pitchFamily="34" charset="-120"/>
               </a:rPr>
-              <a:t> dung</a:t>
-            </a:r>
-            <a:r>
-              <a:rPr lang="en-US" sz="3450" dirty="0" spc="-11" kern="0">
+              <a:t> máy</a:t>
+            </a:r>
+            <a:r>
+              <a:rPr lang="en-US" sz="3450" dirty="0" spc="-14" kern="0">
                 <a:solidFill>
                   <a:srgbClr val="14161C"/>
                 </a:solidFill>
@@ -7181,10 +7181,10 @@
                 <a:ea typeface="Be Vietnam Pro SemiBold" pitchFamily="34" charset="-122"/>
                 <a:cs typeface="Be Vietnam Pro SemiBold" pitchFamily="34" charset="-120"/>
               </a:rPr>
-              <a:t> máy</a:t>
-            </a:r>
-            <a:r>
-              <a:rPr lang="en-US" sz="3450" dirty="0" spc="-14" kern="0">
+              <a:t> gốc</a:t>
+            </a:r>
+            <a:r>
+              <a:rPr lang="en-US" sz="3450" dirty="0" spc="-2" kern="0">
                 <a:solidFill>
                   <a:srgbClr val="14161C"/>
                 </a:solidFill>
@@ -7192,10 +7192,10 @@
                 <a:ea typeface="Be Vietnam Pro SemiBold" pitchFamily="34" charset="-122"/>
                 <a:cs typeface="Be Vietnam Pro SemiBold" pitchFamily="34" charset="-120"/>
               </a:rPr>
-              <a:t> gốc</a:t>
-            </a:r>
-            <a:r>
-              <a:rPr lang="en-US" sz="3450" dirty="0" spc="-3" kern="0">
+              <a:t> cho</a:t>
+            </a:r>
+            <a:r>
+              <a:rPr lang="en-US" sz="3450" dirty="0" spc="-10" kern="0">
                 <a:solidFill>
                   <a:srgbClr val="14161C"/>
                 </a:solidFill>
@@ -7203,21 +7203,10 @@
                 <a:ea typeface="Be Vietnam Pro SemiBold" pitchFamily="34" charset="-122"/>
                 <a:cs typeface="Be Vietnam Pro SemiBold" pitchFamily="34" charset="-120"/>
               </a:rPr>
-              <a:t> cho</a:t>
-            </a:r>
-            <a:r>
-              <a:rPr lang="en-US" sz="3450" dirty="0" spc="-10" kern="0">
-                <a:solidFill>
-                  <a:srgbClr val="14161C"/>
-                </a:solidFill>
-                <a:latin typeface="Be Vietnam Pro SemiBold" pitchFamily="34" charset="0"/>
-                <a:ea typeface="Be Vietnam Pro SemiBold" pitchFamily="34" charset="-122"/>
-                <a:cs typeface="Be Vietnam Pro SemiBold" pitchFamily="34" charset="-120"/>
-              </a:rPr>
               <a:t> phép</a:t>
             </a:r>
             <a:r>
-              <a:rPr lang="en-US" sz="3450" dirty="0" spc="44" kern="0">
+              <a:rPr lang="en-US" sz="3450" dirty="0" spc="43" kern="0">
                 <a:solidFill>
                   <a:srgbClr val="14161C"/>
                 </a:solidFill>
@@ -8237,7 +8226,7 @@
               <a:t> không?</a:t>
             </a:r>
             <a:r>
-              <a:rPr lang="en-US" sz="3300" dirty="0" spc="-18" kern="0">
+              <a:rPr lang="en-US" sz="3300" dirty="0" spc="-3" kern="0">
                 <a:solidFill>
                   <a:srgbClr val="14161C"/>
                 </a:solidFill>
@@ -8245,10 +8234,10 @@
                 <a:ea typeface="Bricolage Grotesque ExtraBold" pitchFamily="34" charset="-122"/>
                 <a:cs typeface="Bricolage Grotesque ExtraBold" pitchFamily="34" charset="-120"/>
               </a:rPr>
-              <a:t> Trình</a:t>
-            </a:r>
-            <a:r>
-              <a:rPr lang="en-US" sz="3300" dirty="0" spc="0" kern="0">
+              <a:t> Còn</a:t>
+            </a:r>
+            <a:r>
+              <a:rPr lang="en-US" sz="3300" dirty="0" spc="-7" kern="0">
                 <a:solidFill>
                   <a:srgbClr val="14161C"/>
                 </a:solidFill>
@@ -8256,10 +8245,10 @@
                 <a:ea typeface="Bricolage Grotesque ExtraBold" pitchFamily="34" charset="-122"/>
                 <a:cs typeface="Bricolage Grotesque ExtraBold" pitchFamily="34" charset="-120"/>
               </a:rPr>
-              <a:t> duyệt</a:t>
-            </a:r>
-            <a:r>
-              <a:rPr lang="en-US" sz="3300" dirty="0" spc="-10" kern="0">
+              <a:t> trình</a:t>
+            </a:r>
+            <a:r>
+              <a:rPr lang="en-US" sz="3300" dirty="0" spc="-1" kern="0">
                 <a:solidFill>
                   <a:srgbClr val="14161C"/>
                 </a:solidFill>
@@ -8267,18 +8256,7 @@
                 <a:ea typeface="Bricolage Grotesque ExtraBold" pitchFamily="34" charset="-122"/>
                 <a:cs typeface="Bricolage Grotesque ExtraBold" pitchFamily="34" charset="-120"/>
               </a:rPr>
-              <a:t> thì</a:t>
-            </a:r>
-            <a:r>
-              <a:rPr lang="en-US" sz="3300" dirty="0" spc="-20" kern="0">
-                <a:solidFill>
-                  <a:srgbClr val="14161C"/>
-                </a:solidFill>
-                <a:latin typeface="Bricolage Grotesque ExtraBold" pitchFamily="34" charset="0"/>
-                <a:ea typeface="Bricolage Grotesque ExtraBold" pitchFamily="34" charset="-122"/>
-                <a:cs typeface="Bricolage Grotesque ExtraBold" pitchFamily="34" charset="-120"/>
-              </a:rPr>
-              <a:t> sao?</a:t>
+              <a:t> duyệt?</a:t>
             </a:r>
             <a:endParaRPr lang="en-US" sz="3300" dirty="0"/>
           </a:p>

--- a/system-design-101/vi/lessons/sd-06-002/slides/sd-06-002.pptx
+++ b/system-design-101/vi/lessons/sd-06-002/slides/sd-06-002.pptx
@@ -1783,7 +1783,7 @@
               <a:t> đâu,</a:t>
             </a:r>
             <a:r>
-              <a:rPr lang="en-US" sz="7500" dirty="0" spc="-82" kern="0">
+              <a:rPr lang="en-US" sz="7500" dirty="0" spc="1" kern="0">
                 <a:solidFill>
                   <a:srgbClr val="F3EEE3"/>
                 </a:solidFill>
@@ -1791,7 +1791,7 @@
                 <a:ea typeface="Bricolage Grotesque ExtraBold" pitchFamily="34" charset="-122"/>
                 <a:cs typeface="Bricolage Grotesque ExtraBold" pitchFamily="34" charset="-120"/>
               </a:rPr>
-              <a:t> và</a:t>
+              <a:t> máy</a:t>
             </a:r>
             <a:r>
               <a:rPr lang="en-US" sz="7500" dirty="0" spc="2" kern="0">
@@ -1802,10 +1802,10 @@
                 <a:ea typeface="Bricolage Grotesque ExtraBold" pitchFamily="34" charset="-122"/>
                 <a:cs typeface="Bricolage Grotesque ExtraBold" pitchFamily="34" charset="-120"/>
               </a:rPr>
-              <a:t> máy</a:t>
-            </a:r>
-            <a:r>
-              <a:rPr lang="en-US" sz="7500" dirty="0" spc="1" kern="0">
+              <a:t> chủ</a:t>
+            </a:r>
+            <a:r>
+              <a:rPr lang="en-US" sz="7500" dirty="0" spc="4" kern="0">
                 <a:solidFill>
                   <a:srgbClr val="F3EEE3"/>
                 </a:solidFill>
@@ -1813,10 +1813,10 @@
                 <a:ea typeface="Bricolage Grotesque ExtraBold" pitchFamily="34" charset="-122"/>
                 <a:cs typeface="Bricolage Grotesque ExtraBold" pitchFamily="34" charset="-120"/>
               </a:rPr>
-              <a:t> chủ</a:t>
-            </a:r>
-            <a:r>
-              <a:rPr lang="en-US" sz="7500" dirty="0" spc="4" kern="0">
+              <a:t> biên</a:t>
+            </a:r>
+            <a:r>
+              <a:rPr lang="en-US" sz="7500" dirty="0" spc="0" kern="0">
                 <a:solidFill>
                   <a:srgbClr val="F3EEE3"/>
                 </a:solidFill>
@@ -1824,29 +1824,7 @@
                 <a:ea typeface="Bricolage Grotesque ExtraBold" pitchFamily="34" charset="-122"/>
                 <a:cs typeface="Bricolage Grotesque ExtraBold" pitchFamily="34" charset="-120"/>
               </a:rPr>
-              <a:t> biên</a:t>
-            </a:r>
-            <a:r>
-              <a:rPr lang="en-US" sz="7500" dirty="0" spc="0" kern="0">
-                <a:solidFill>
-                  <a:srgbClr val="F3EEE3"/>
-                </a:solidFill>
-                <a:latin typeface="Bricolage Grotesque ExtraBold" pitchFamily="34" charset="0"/>
-                <a:ea typeface="Bricolage Grotesque ExtraBold" pitchFamily="34" charset="-122"/>
-                <a:cs typeface="Bricolage Grotesque ExtraBold" pitchFamily="34" charset="-120"/>
-              </a:rPr>
               <a:t> lưu</a:t>
-            </a:r>
-            <a:r>
-              <a:rPr lang="en-US" sz="7500" dirty="0" spc="9" kern="0">
-                <a:solidFill>
-                  <a:srgbClr val="F3EEE3"/>
-                </a:solidFill>
-                <a:latin typeface="Bricolage Grotesque ExtraBold" pitchFamily="34" charset="0"/>
-                <a:ea typeface="Bricolage Grotesque ExtraBold" pitchFamily="34" charset="-122"/>
-                <a:cs typeface="Bricolage Grotesque ExtraBold" pitchFamily="34" charset="-120"/>
-              </a:rPr>
-              <a:t> những</a:t>
             </a:r>
             <a:r>
               <a:rPr lang="en-US" sz="7500" dirty="0" spc="-28" kern="0">
